--- a/35神的管教.pptx
+++ b/35神的管教.pptx
@@ -168,7 +168,7 @@
           <a:lstStyle/>
           <a:p>
             <a:r>
-              <a:rPr lang="en-US" altLang="zh-TW" smtClean="0"/>
+              <a:rPr lang="en-US" altLang="zh-TW"/>
               <a:t>Click to edit Master title style</a:t>
             </a:r>
             <a:endParaRPr lang="zh-TW" altLang="en-US"/>
@@ -287,7 +287,7 @@
           </a:lstStyle>
           <a:p>
             <a:r>
-              <a:rPr lang="en-US" altLang="zh-TW" smtClean="0"/>
+              <a:rPr lang="en-US" altLang="zh-TW"/>
               <a:t>Click to edit Master subtitle style</a:t>
             </a:r>
             <a:endParaRPr lang="zh-TW" altLang="en-US"/>
@@ -312,7 +312,7 @@
             <a:fld id="{86B5546F-C09B-4E63-ABC5-F7C86A7E8D66}" type="datetimeFigureOut">
               <a:rPr lang="en-US" smtClean="0"/>
               <a:pPr/>
-              <a:t>6/9/2022</a:t>
+              <a:t>3/14/2025</a:t>
             </a:fld>
             <a:endParaRPr lang="en-US"/>
           </a:p>
@@ -407,7 +407,7 @@
           <a:lstStyle/>
           <a:p>
             <a:r>
-              <a:rPr lang="en-US" altLang="zh-TW" smtClean="0"/>
+              <a:rPr lang="en-US" altLang="zh-TW"/>
               <a:t>Click to edit Master title style</a:t>
             </a:r>
             <a:endParaRPr lang="zh-TW" altLang="en-US"/>
@@ -431,35 +431,35 @@
           <a:p>
             <a:pPr lvl="0"/>
             <a:r>
-              <a:rPr lang="en-US" altLang="zh-TW" smtClean="0"/>
+              <a:rPr lang="en-US" altLang="zh-TW"/>
               <a:t>Edit Master text styles</a:t>
             </a:r>
           </a:p>
           <a:p>
             <a:pPr lvl="1"/>
             <a:r>
-              <a:rPr lang="en-US" altLang="zh-TW" smtClean="0"/>
+              <a:rPr lang="en-US" altLang="zh-TW"/>
               <a:t>Second level</a:t>
             </a:r>
           </a:p>
           <a:p>
             <a:pPr lvl="2"/>
             <a:r>
-              <a:rPr lang="en-US" altLang="zh-TW" smtClean="0"/>
+              <a:rPr lang="en-US" altLang="zh-TW"/>
               <a:t>Third level</a:t>
             </a:r>
           </a:p>
           <a:p>
             <a:pPr lvl="3"/>
             <a:r>
-              <a:rPr lang="en-US" altLang="zh-TW" smtClean="0"/>
+              <a:rPr lang="en-US" altLang="zh-TW"/>
               <a:t>Fourth level</a:t>
             </a:r>
           </a:p>
           <a:p>
             <a:pPr lvl="4"/>
             <a:r>
-              <a:rPr lang="en-US" altLang="zh-TW" smtClean="0"/>
+              <a:rPr lang="en-US" altLang="zh-TW"/>
               <a:t>Fifth level</a:t>
             </a:r>
             <a:endParaRPr lang="zh-TW" altLang="en-US"/>
@@ -484,7 +484,7 @@
             <a:fld id="{86B5546F-C09B-4E63-ABC5-F7C86A7E8D66}" type="datetimeFigureOut">
               <a:rPr lang="en-US" smtClean="0"/>
               <a:pPr/>
-              <a:t>6/9/2022</a:t>
+              <a:t>3/14/2025</a:t>
             </a:fld>
             <a:endParaRPr lang="en-US"/>
           </a:p>
@@ -584,7 +584,7 @@
           <a:lstStyle/>
           <a:p>
             <a:r>
-              <a:rPr lang="en-US" altLang="zh-TW" smtClean="0"/>
+              <a:rPr lang="en-US" altLang="zh-TW"/>
               <a:t>Click to edit Master title style</a:t>
             </a:r>
             <a:endParaRPr lang="zh-TW" altLang="en-US"/>
@@ -613,35 +613,35 @@
           <a:p>
             <a:pPr lvl="0"/>
             <a:r>
-              <a:rPr lang="en-US" altLang="zh-TW" smtClean="0"/>
+              <a:rPr lang="en-US" altLang="zh-TW"/>
               <a:t>Edit Master text styles</a:t>
             </a:r>
           </a:p>
           <a:p>
             <a:pPr lvl="1"/>
             <a:r>
-              <a:rPr lang="en-US" altLang="zh-TW" smtClean="0"/>
+              <a:rPr lang="en-US" altLang="zh-TW"/>
               <a:t>Second level</a:t>
             </a:r>
           </a:p>
           <a:p>
             <a:pPr lvl="2"/>
             <a:r>
-              <a:rPr lang="en-US" altLang="zh-TW" smtClean="0"/>
+              <a:rPr lang="en-US" altLang="zh-TW"/>
               <a:t>Third level</a:t>
             </a:r>
           </a:p>
           <a:p>
             <a:pPr lvl="3"/>
             <a:r>
-              <a:rPr lang="en-US" altLang="zh-TW" smtClean="0"/>
+              <a:rPr lang="en-US" altLang="zh-TW"/>
               <a:t>Fourth level</a:t>
             </a:r>
           </a:p>
           <a:p>
             <a:pPr lvl="4"/>
             <a:r>
-              <a:rPr lang="en-US" altLang="zh-TW" smtClean="0"/>
+              <a:rPr lang="en-US" altLang="zh-TW"/>
               <a:t>Fifth level</a:t>
             </a:r>
             <a:endParaRPr lang="zh-TW" altLang="en-US"/>
@@ -666,7 +666,7 @@
             <a:fld id="{86B5546F-C09B-4E63-ABC5-F7C86A7E8D66}" type="datetimeFigureOut">
               <a:rPr lang="en-US" smtClean="0"/>
               <a:pPr/>
-              <a:t>6/9/2022</a:t>
+              <a:t>3/14/2025</a:t>
             </a:fld>
             <a:endParaRPr lang="en-US"/>
           </a:p>
@@ -761,7 +761,7 @@
           <a:lstStyle/>
           <a:p>
             <a:r>
-              <a:rPr lang="en-US" altLang="zh-TW" smtClean="0"/>
+              <a:rPr lang="en-US" altLang="zh-TW"/>
               <a:t>Click to edit Master title style</a:t>
             </a:r>
             <a:endParaRPr lang="zh-TW" altLang="en-US"/>
@@ -785,35 +785,35 @@
           <a:p>
             <a:pPr lvl="0"/>
             <a:r>
-              <a:rPr lang="en-US" altLang="zh-TW" smtClean="0"/>
+              <a:rPr lang="en-US" altLang="zh-TW"/>
               <a:t>Edit Master text styles</a:t>
             </a:r>
           </a:p>
           <a:p>
             <a:pPr lvl="1"/>
             <a:r>
-              <a:rPr lang="en-US" altLang="zh-TW" smtClean="0"/>
+              <a:rPr lang="en-US" altLang="zh-TW"/>
               <a:t>Second level</a:t>
             </a:r>
           </a:p>
           <a:p>
             <a:pPr lvl="2"/>
             <a:r>
-              <a:rPr lang="en-US" altLang="zh-TW" smtClean="0"/>
+              <a:rPr lang="en-US" altLang="zh-TW"/>
               <a:t>Third level</a:t>
             </a:r>
           </a:p>
           <a:p>
             <a:pPr lvl="3"/>
             <a:r>
-              <a:rPr lang="en-US" altLang="zh-TW" smtClean="0"/>
+              <a:rPr lang="en-US" altLang="zh-TW"/>
               <a:t>Fourth level</a:t>
             </a:r>
           </a:p>
           <a:p>
             <a:pPr lvl="4"/>
             <a:r>
-              <a:rPr lang="en-US" altLang="zh-TW" smtClean="0"/>
+              <a:rPr lang="en-US" altLang="zh-TW"/>
               <a:t>Fifth level</a:t>
             </a:r>
             <a:endParaRPr lang="zh-TW" altLang="en-US"/>
@@ -838,7 +838,7 @@
             <a:fld id="{86B5546F-C09B-4E63-ABC5-F7C86A7E8D66}" type="datetimeFigureOut">
               <a:rPr lang="en-US" smtClean="0"/>
               <a:pPr/>
-              <a:t>6/9/2022</a:t>
+              <a:t>3/14/2025</a:t>
             </a:fld>
             <a:endParaRPr lang="en-US"/>
           </a:p>
@@ -942,7 +942,7 @@
           </a:lstStyle>
           <a:p>
             <a:r>
-              <a:rPr lang="en-US" altLang="zh-TW" smtClean="0"/>
+              <a:rPr lang="en-US" altLang="zh-TW"/>
               <a:t>Click to edit Master title style</a:t>
             </a:r>
             <a:endParaRPr lang="zh-TW" altLang="en-US"/>
@@ -1062,7 +1062,7 @@
           <a:p>
             <a:pPr lvl="0"/>
             <a:r>
-              <a:rPr lang="en-US" altLang="zh-TW" smtClean="0"/>
+              <a:rPr lang="en-US" altLang="zh-TW"/>
               <a:t>Edit Master text styles</a:t>
             </a:r>
           </a:p>
@@ -1086,7 +1086,7 @@
             <a:fld id="{86B5546F-C09B-4E63-ABC5-F7C86A7E8D66}" type="datetimeFigureOut">
               <a:rPr lang="en-US" smtClean="0"/>
               <a:pPr/>
-              <a:t>6/9/2022</a:t>
+              <a:t>3/14/2025</a:t>
             </a:fld>
             <a:endParaRPr lang="en-US"/>
           </a:p>
@@ -1181,7 +1181,7 @@
           <a:lstStyle/>
           <a:p>
             <a:r>
-              <a:rPr lang="en-US" altLang="zh-TW" smtClean="0"/>
+              <a:rPr lang="en-US" altLang="zh-TW"/>
               <a:t>Click to edit Master title style</a:t>
             </a:r>
             <a:endParaRPr lang="zh-TW" altLang="en-US"/>
@@ -1238,35 +1238,35 @@
           <a:p>
             <a:pPr lvl="0"/>
             <a:r>
-              <a:rPr lang="en-US" altLang="zh-TW" smtClean="0"/>
+              <a:rPr lang="en-US" altLang="zh-TW"/>
               <a:t>Edit Master text styles</a:t>
             </a:r>
           </a:p>
           <a:p>
             <a:pPr lvl="1"/>
             <a:r>
-              <a:rPr lang="en-US" altLang="zh-TW" smtClean="0"/>
+              <a:rPr lang="en-US" altLang="zh-TW"/>
               <a:t>Second level</a:t>
             </a:r>
           </a:p>
           <a:p>
             <a:pPr lvl="2"/>
             <a:r>
-              <a:rPr lang="en-US" altLang="zh-TW" smtClean="0"/>
+              <a:rPr lang="en-US" altLang="zh-TW"/>
               <a:t>Third level</a:t>
             </a:r>
           </a:p>
           <a:p>
             <a:pPr lvl="3"/>
             <a:r>
-              <a:rPr lang="en-US" altLang="zh-TW" smtClean="0"/>
+              <a:rPr lang="en-US" altLang="zh-TW"/>
               <a:t>Fourth level</a:t>
             </a:r>
           </a:p>
           <a:p>
             <a:pPr lvl="4"/>
             <a:r>
-              <a:rPr lang="en-US" altLang="zh-TW" smtClean="0"/>
+              <a:rPr lang="en-US" altLang="zh-TW"/>
               <a:t>Fifth level</a:t>
             </a:r>
             <a:endParaRPr lang="zh-TW" altLang="en-US"/>
@@ -1323,35 +1323,35 @@
           <a:p>
             <a:pPr lvl="0"/>
             <a:r>
-              <a:rPr lang="en-US" altLang="zh-TW" smtClean="0"/>
+              <a:rPr lang="en-US" altLang="zh-TW"/>
               <a:t>Edit Master text styles</a:t>
             </a:r>
           </a:p>
           <a:p>
             <a:pPr lvl="1"/>
             <a:r>
-              <a:rPr lang="en-US" altLang="zh-TW" smtClean="0"/>
+              <a:rPr lang="en-US" altLang="zh-TW"/>
               <a:t>Second level</a:t>
             </a:r>
           </a:p>
           <a:p>
             <a:pPr lvl="2"/>
             <a:r>
-              <a:rPr lang="en-US" altLang="zh-TW" smtClean="0"/>
+              <a:rPr lang="en-US" altLang="zh-TW"/>
               <a:t>Third level</a:t>
             </a:r>
           </a:p>
           <a:p>
             <a:pPr lvl="3"/>
             <a:r>
-              <a:rPr lang="en-US" altLang="zh-TW" smtClean="0"/>
+              <a:rPr lang="en-US" altLang="zh-TW"/>
               <a:t>Fourth level</a:t>
             </a:r>
           </a:p>
           <a:p>
             <a:pPr lvl="4"/>
             <a:r>
-              <a:rPr lang="en-US" altLang="zh-TW" smtClean="0"/>
+              <a:rPr lang="en-US" altLang="zh-TW"/>
               <a:t>Fifth level</a:t>
             </a:r>
             <a:endParaRPr lang="zh-TW" altLang="en-US"/>
@@ -1376,7 +1376,7 @@
             <a:fld id="{86B5546F-C09B-4E63-ABC5-F7C86A7E8D66}" type="datetimeFigureOut">
               <a:rPr lang="en-US" smtClean="0"/>
               <a:pPr/>
-              <a:t>6/9/2022</a:t>
+              <a:t>3/14/2025</a:t>
             </a:fld>
             <a:endParaRPr lang="en-US"/>
           </a:p>
@@ -1475,7 +1475,7 @@
           </a:lstStyle>
           <a:p>
             <a:r>
-              <a:rPr lang="en-US" altLang="zh-TW" smtClean="0"/>
+              <a:rPr lang="en-US" altLang="zh-TW"/>
               <a:t>Click to edit Master title style</a:t>
             </a:r>
             <a:endParaRPr lang="zh-TW" altLang="en-US"/>
@@ -1541,7 +1541,7 @@
           <a:p>
             <a:pPr lvl="0"/>
             <a:r>
-              <a:rPr lang="en-US" altLang="zh-TW" smtClean="0"/>
+              <a:rPr lang="en-US" altLang="zh-TW"/>
               <a:t>Edit Master text styles</a:t>
             </a:r>
           </a:p>
@@ -1597,35 +1597,35 @@
           <a:p>
             <a:pPr lvl="0"/>
             <a:r>
-              <a:rPr lang="en-US" altLang="zh-TW" smtClean="0"/>
+              <a:rPr lang="en-US" altLang="zh-TW"/>
               <a:t>Edit Master text styles</a:t>
             </a:r>
           </a:p>
           <a:p>
             <a:pPr lvl="1"/>
             <a:r>
-              <a:rPr lang="en-US" altLang="zh-TW" smtClean="0"/>
+              <a:rPr lang="en-US" altLang="zh-TW"/>
               <a:t>Second level</a:t>
             </a:r>
           </a:p>
           <a:p>
             <a:pPr lvl="2"/>
             <a:r>
-              <a:rPr lang="en-US" altLang="zh-TW" smtClean="0"/>
+              <a:rPr lang="en-US" altLang="zh-TW"/>
               <a:t>Third level</a:t>
             </a:r>
           </a:p>
           <a:p>
             <a:pPr lvl="3"/>
             <a:r>
-              <a:rPr lang="en-US" altLang="zh-TW" smtClean="0"/>
+              <a:rPr lang="en-US" altLang="zh-TW"/>
               <a:t>Fourth level</a:t>
             </a:r>
           </a:p>
           <a:p>
             <a:pPr lvl="4"/>
             <a:r>
-              <a:rPr lang="en-US" altLang="zh-TW" smtClean="0"/>
+              <a:rPr lang="en-US" altLang="zh-TW"/>
               <a:t>Fifth level</a:t>
             </a:r>
             <a:endParaRPr lang="zh-TW" altLang="en-US"/>
@@ -1691,7 +1691,7 @@
           <a:p>
             <a:pPr lvl="0"/>
             <a:r>
-              <a:rPr lang="en-US" altLang="zh-TW" smtClean="0"/>
+              <a:rPr lang="en-US" altLang="zh-TW"/>
               <a:t>Edit Master text styles</a:t>
             </a:r>
           </a:p>
@@ -1747,35 +1747,35 @@
           <a:p>
             <a:pPr lvl="0"/>
             <a:r>
-              <a:rPr lang="en-US" altLang="zh-TW" smtClean="0"/>
+              <a:rPr lang="en-US" altLang="zh-TW"/>
               <a:t>Edit Master text styles</a:t>
             </a:r>
           </a:p>
           <a:p>
             <a:pPr lvl="1"/>
             <a:r>
-              <a:rPr lang="en-US" altLang="zh-TW" smtClean="0"/>
+              <a:rPr lang="en-US" altLang="zh-TW"/>
               <a:t>Second level</a:t>
             </a:r>
           </a:p>
           <a:p>
             <a:pPr lvl="2"/>
             <a:r>
-              <a:rPr lang="en-US" altLang="zh-TW" smtClean="0"/>
+              <a:rPr lang="en-US" altLang="zh-TW"/>
               <a:t>Third level</a:t>
             </a:r>
           </a:p>
           <a:p>
             <a:pPr lvl="3"/>
             <a:r>
-              <a:rPr lang="en-US" altLang="zh-TW" smtClean="0"/>
+              <a:rPr lang="en-US" altLang="zh-TW"/>
               <a:t>Fourth level</a:t>
             </a:r>
           </a:p>
           <a:p>
             <a:pPr lvl="4"/>
             <a:r>
-              <a:rPr lang="en-US" altLang="zh-TW" smtClean="0"/>
+              <a:rPr lang="en-US" altLang="zh-TW"/>
               <a:t>Fifth level</a:t>
             </a:r>
             <a:endParaRPr lang="zh-TW" altLang="en-US"/>
@@ -1800,7 +1800,7 @@
             <a:fld id="{86B5546F-C09B-4E63-ABC5-F7C86A7E8D66}" type="datetimeFigureOut">
               <a:rPr lang="en-US" smtClean="0"/>
               <a:pPr/>
-              <a:t>6/9/2022</a:t>
+              <a:t>3/14/2025</a:t>
             </a:fld>
             <a:endParaRPr lang="en-US"/>
           </a:p>
@@ -1895,7 +1895,7 @@
           <a:lstStyle/>
           <a:p>
             <a:r>
-              <a:rPr lang="en-US" altLang="zh-TW" smtClean="0"/>
+              <a:rPr lang="en-US" altLang="zh-TW"/>
               <a:t>Click to edit Master title style</a:t>
             </a:r>
             <a:endParaRPr lang="zh-TW" altLang="en-US"/>
@@ -1920,7 +1920,7 @@
             <a:fld id="{86B5546F-C09B-4E63-ABC5-F7C86A7E8D66}" type="datetimeFigureOut">
               <a:rPr lang="en-US" smtClean="0"/>
               <a:pPr/>
-              <a:t>6/9/2022</a:t>
+              <a:t>3/14/2025</a:t>
             </a:fld>
             <a:endParaRPr lang="en-US"/>
           </a:p>
@@ -2017,7 +2017,7 @@
             <a:fld id="{86B5546F-C09B-4E63-ABC5-F7C86A7E8D66}" type="datetimeFigureOut">
               <a:rPr lang="en-US" smtClean="0"/>
               <a:pPr/>
-              <a:t>6/9/2022</a:t>
+              <a:t>3/14/2025</a:t>
             </a:fld>
             <a:endParaRPr lang="en-US"/>
           </a:p>
@@ -2121,7 +2121,7 @@
           </a:lstStyle>
           <a:p>
             <a:r>
-              <a:rPr lang="en-US" altLang="zh-TW" smtClean="0"/>
+              <a:rPr lang="en-US" altLang="zh-TW"/>
               <a:t>Click to edit Master title style</a:t>
             </a:r>
             <a:endParaRPr lang="zh-TW" altLang="en-US"/>
@@ -2178,35 +2178,35 @@
           <a:p>
             <a:pPr lvl="0"/>
             <a:r>
-              <a:rPr lang="en-US" altLang="zh-TW" smtClean="0"/>
+              <a:rPr lang="en-US" altLang="zh-TW"/>
               <a:t>Edit Master text styles</a:t>
             </a:r>
           </a:p>
           <a:p>
             <a:pPr lvl="1"/>
             <a:r>
-              <a:rPr lang="en-US" altLang="zh-TW" smtClean="0"/>
+              <a:rPr lang="en-US" altLang="zh-TW"/>
               <a:t>Second level</a:t>
             </a:r>
           </a:p>
           <a:p>
             <a:pPr lvl="2"/>
             <a:r>
-              <a:rPr lang="en-US" altLang="zh-TW" smtClean="0"/>
+              <a:rPr lang="en-US" altLang="zh-TW"/>
               <a:t>Third level</a:t>
             </a:r>
           </a:p>
           <a:p>
             <a:pPr lvl="3"/>
             <a:r>
-              <a:rPr lang="en-US" altLang="zh-TW" smtClean="0"/>
+              <a:rPr lang="en-US" altLang="zh-TW"/>
               <a:t>Fourth level</a:t>
             </a:r>
           </a:p>
           <a:p>
             <a:pPr lvl="4"/>
             <a:r>
-              <a:rPr lang="en-US" altLang="zh-TW" smtClean="0"/>
+              <a:rPr lang="en-US" altLang="zh-TW"/>
               <a:t>Fifth level</a:t>
             </a:r>
             <a:endParaRPr lang="zh-TW" altLang="en-US"/>
@@ -2272,7 +2272,7 @@
           <a:p>
             <a:pPr lvl="0"/>
             <a:r>
-              <a:rPr lang="en-US" altLang="zh-TW" smtClean="0"/>
+              <a:rPr lang="en-US" altLang="zh-TW"/>
               <a:t>Edit Master text styles</a:t>
             </a:r>
           </a:p>
@@ -2296,7 +2296,7 @@
             <a:fld id="{86B5546F-C09B-4E63-ABC5-F7C86A7E8D66}" type="datetimeFigureOut">
               <a:rPr lang="en-US" smtClean="0"/>
               <a:pPr/>
-              <a:t>6/9/2022</a:t>
+              <a:t>3/14/2025</a:t>
             </a:fld>
             <a:endParaRPr lang="en-US"/>
           </a:p>
@@ -2400,7 +2400,7 @@
           </a:lstStyle>
           <a:p>
             <a:r>
-              <a:rPr lang="en-US" altLang="zh-TW" smtClean="0"/>
+              <a:rPr lang="en-US" altLang="zh-TW"/>
               <a:t>Click to edit Master title style</a:t>
             </a:r>
             <a:endParaRPr lang="zh-TW" altLang="en-US"/>
@@ -2465,7 +2465,7 @@
           </a:lstStyle>
           <a:p>
             <a:r>
-              <a:rPr lang="en-US" altLang="zh-TW" smtClean="0"/>
+              <a:rPr lang="en-US" altLang="zh-TW"/>
               <a:t>Click icon to add picture</a:t>
             </a:r>
             <a:endParaRPr lang="zh-TW" altLang="en-US"/>
@@ -2531,7 +2531,7 @@
           <a:p>
             <a:pPr lvl="0"/>
             <a:r>
-              <a:rPr lang="en-US" altLang="zh-TW" smtClean="0"/>
+              <a:rPr lang="en-US" altLang="zh-TW"/>
               <a:t>Edit Master text styles</a:t>
             </a:r>
           </a:p>
@@ -2555,7 +2555,7 @@
             <a:fld id="{86B5546F-C09B-4E63-ABC5-F7C86A7E8D66}" type="datetimeFigureOut">
               <a:rPr lang="en-US" smtClean="0"/>
               <a:pPr/>
-              <a:t>6/9/2022</a:t>
+              <a:t>3/14/2025</a:t>
             </a:fld>
             <a:endParaRPr lang="en-US"/>
           </a:p>
@@ -2670,10 +2670,9 @@
           <a:lstStyle/>
           <a:p>
             <a:r>
-              <a:rPr lang="zh-TW" altLang="en-US" smtClean="0"/>
+              <a:rPr lang="zh-TW" altLang="en-US"/>
               <a:t>按一下以編輯母片標題樣式</a:t>
             </a:r>
-            <a:endParaRPr lang="zh-TW" altLang="en-US"/>
           </a:p>
         </p:txBody>
       </p:sp>
@@ -2704,38 +2703,37 @@
           <a:p>
             <a:pPr lvl="0"/>
             <a:r>
-              <a:rPr lang="zh-TW" altLang="en-US" smtClean="0"/>
+              <a:rPr lang="zh-TW" altLang="en-US"/>
               <a:t>按一下以編輯母片文字樣式</a:t>
             </a:r>
           </a:p>
           <a:p>
             <a:pPr lvl="1"/>
             <a:r>
-              <a:rPr lang="zh-TW" altLang="en-US" smtClean="0"/>
+              <a:rPr lang="zh-TW" altLang="en-US"/>
               <a:t>第二層</a:t>
             </a:r>
           </a:p>
           <a:p>
             <a:pPr lvl="2"/>
             <a:r>
-              <a:rPr lang="zh-TW" altLang="en-US" smtClean="0"/>
+              <a:rPr lang="zh-TW" altLang="en-US"/>
               <a:t>第三層</a:t>
             </a:r>
           </a:p>
           <a:p>
             <a:pPr lvl="3"/>
             <a:r>
-              <a:rPr lang="zh-TW" altLang="en-US" smtClean="0"/>
+              <a:rPr lang="zh-TW" altLang="en-US"/>
               <a:t>第四層</a:t>
             </a:r>
           </a:p>
           <a:p>
             <a:pPr lvl="4"/>
             <a:r>
-              <a:rPr lang="zh-TW" altLang="en-US" smtClean="0"/>
+              <a:rPr lang="zh-TW" altLang="en-US"/>
               <a:t>第五層</a:t>
             </a:r>
-            <a:endParaRPr lang="zh-TW" altLang="en-US"/>
           </a:p>
         </p:txBody>
       </p:sp>
@@ -2775,7 +2773,7 @@
             <a:fld id="{86B5546F-C09B-4E63-ABC5-F7C86A7E8D66}" type="datetimeFigureOut">
               <a:rPr lang="en-US" smtClean="0"/>
               <a:pPr/>
-              <a:t>6/9/2022</a:t>
+              <a:t>3/14/2025</a:t>
             </a:fld>
             <a:endParaRPr lang="en-US"/>
           </a:p>
@@ -3171,7 +3169,7 @@
             <a:r>
               <a:rPr lang="zh-TW" altLang="en-US" sz="9600" b="1" dirty="0">
                 <a:solidFill>
-                  <a:srgbClr val="660033"/>
+                  <a:srgbClr val="000066"/>
                 </a:solidFill>
                 <a:effectLst>
                   <a:outerShdw blurRad="38100" dist="38100" dir="2700000" algn="tl">
@@ -3187,7 +3185,7 @@
             </a:r>
             <a:endParaRPr lang="en-US" altLang="zh-TW" sz="9600" b="1" dirty="0">
               <a:solidFill>
-                <a:srgbClr val="660033"/>
+                <a:srgbClr val="000066"/>
               </a:solidFill>
               <a:effectLst>
                 <a:outerShdw blurRad="38100" dist="38100" dir="2700000" algn="tl">
@@ -3220,9 +3218,9 @@
           <a:lstStyle/>
           <a:p>
             <a:r>
-              <a:rPr lang="zh-CN" altLang="en-US" sz="4000" b="1" dirty="0" smtClean="0">
+              <a:rPr lang="zh-CN" altLang="en-US" sz="4000" b="1" dirty="0">
                 <a:solidFill>
-                  <a:srgbClr val="000066"/>
+                  <a:srgbClr val="660033"/>
                 </a:solidFill>
                 <a:latin typeface="微軟正黑體" pitchFamily="34" charset="-120"/>
                 <a:ea typeface="微軟正黑體" pitchFamily="34" charset="-120"/>
@@ -3230,9 +3228,9 @@
               <a:t>來  </a:t>
             </a:r>
             <a:r>
-              <a:rPr lang="en-US" altLang="zh-CN" sz="4000" b="1" dirty="0" smtClean="0">
+              <a:rPr lang="en-US" altLang="zh-CN" sz="4000" b="1" dirty="0">
                 <a:solidFill>
-                  <a:srgbClr val="000066"/>
+                  <a:srgbClr val="660033"/>
                 </a:solidFill>
                 <a:latin typeface="微軟正黑體" pitchFamily="34" charset="-120"/>
                 <a:ea typeface="微軟正黑體" pitchFamily="34" charset="-120"/>
@@ -3242,7 +3240,7 @@
             <a:r>
               <a:rPr lang="zh-CN" altLang="en-US" sz="4000" b="1" dirty="0">
                 <a:solidFill>
-                  <a:srgbClr val="000066"/>
+                  <a:srgbClr val="660033"/>
                 </a:solidFill>
                 <a:latin typeface="微軟正黑體" pitchFamily="34" charset="-120"/>
                 <a:ea typeface="微軟正黑體" pitchFamily="34" charset="-120"/>
@@ -3250,9 +3248,9 @@
               <a:t>；</a:t>
             </a:r>
             <a:r>
-              <a:rPr lang="en-US" altLang="zh-CN" sz="4000" b="1" dirty="0" smtClean="0">
+              <a:rPr lang="en-US" altLang="zh-CN" sz="4000" b="1" dirty="0">
                 <a:solidFill>
-                  <a:srgbClr val="000066"/>
+                  <a:srgbClr val="660033"/>
                 </a:solidFill>
                 <a:latin typeface="微軟正黑體" pitchFamily="34" charset="-120"/>
                 <a:ea typeface="微軟正黑體" pitchFamily="34" charset="-120"/>
@@ -3261,7 +3259,7 @@
             </a:r>
             <a:endParaRPr lang="en-US" altLang="zh-TW" sz="4000" b="1" dirty="0">
               <a:solidFill>
-                <a:srgbClr val="000066"/>
+                <a:srgbClr val="660033"/>
               </a:solidFill>
               <a:latin typeface="微軟正黑體" pitchFamily="34" charset="-120"/>
               <a:ea typeface="微軟正黑體" pitchFamily="34" charset="-120"/>
@@ -3358,13 +3356,6 @@
   <p:clrMapOvr>
     <a:masterClrMapping/>
   </p:clrMapOvr>
-  <p:timing>
-    <p:tnLst>
-      <p:par>
-        <p:cTn id="1" dur="indefinite" restart="never" nodeType="tmRoot"/>
-      </p:par>
-    </p:tnLst>
-  </p:timing>
 </p:sld>
 </file>
 
@@ -3449,13 +3440,6 @@
   <p:clrMapOvr>
     <a:masterClrMapping/>
   </p:clrMapOvr>
-  <p:timing>
-    <p:tnLst>
-      <p:par>
-        <p:cTn id="1" dur="indefinite" restart="never" nodeType="tmRoot"/>
-      </p:par>
-    </p:tnLst>
-  </p:timing>
 </p:sld>
 </file>
 
@@ -3521,13 +3505,6 @@
   <p:clrMapOvr>
     <a:masterClrMapping/>
   </p:clrMapOvr>
-  <p:timing>
-    <p:tnLst>
-      <p:par>
-        <p:cTn id="1" dur="indefinite" restart="never" nodeType="tmRoot"/>
-      </p:par>
-    </p:tnLst>
-  </p:timing>
 </p:sld>
 </file>
 
@@ -3593,13 +3570,6 @@
   <p:clrMapOvr>
     <a:masterClrMapping/>
   </p:clrMapOvr>
-  <p:timing>
-    <p:tnLst>
-      <p:par>
-        <p:cTn id="1" dur="indefinite" restart="never" nodeType="tmRoot"/>
-      </p:par>
-    </p:tnLst>
-  </p:timing>
 </p:sld>
 </file>
 
@@ -3677,13 +3647,6 @@
   <p:clrMapOvr>
     <a:masterClrMapping/>
   </p:clrMapOvr>
-  <p:timing>
-    <p:tnLst>
-      <p:par>
-        <p:cTn id="1" dur="indefinite" restart="never" nodeType="tmRoot"/>
-      </p:par>
-    </p:tnLst>
-  </p:timing>
 </p:sld>
 </file>
 
@@ -3756,13 +3719,6 @@
   <p:clrMapOvr>
     <a:masterClrMapping/>
   </p:clrMapOvr>
-  <p:timing>
-    <p:tnLst>
-      <p:par>
-        <p:cTn id="1" dur="indefinite" restart="never" nodeType="tmRoot"/>
-      </p:par>
-    </p:tnLst>
-  </p:timing>
 </p:sld>
 </file>
 
@@ -3828,13 +3784,6 @@
   <p:clrMapOvr>
     <a:masterClrMapping/>
   </p:clrMapOvr>
-  <p:timing>
-    <p:tnLst>
-      <p:par>
-        <p:cTn id="1" dur="indefinite" restart="never" nodeType="tmRoot"/>
-      </p:par>
-    </p:tnLst>
-  </p:timing>
 </p:sld>
 </file>
 
